--- a/docs/presentation-2026-09-25/NoaCG-2026-09-25.pptx
+++ b/docs/presentation-2026-09-25/NoaCG-2026-09-25.pptx
@@ -879,10 +879,10 @@
               <a:rPr lang="en-US" dirty="0"/>
               <a:t>§4. R2.1 is for everyone, subscription or not. R2.3: you drive one agent on the screen; the evidence is the 2026-08-22 round, 25 of 25 cells validator-clean and every one airable in your own blind read (benchmarks/agent/rounds/2026-08-22/VERDICT.md).
 THE NUMBER. docs/AGENT_CLI.md, "Time to air, measured": one walk, one machine, 2026-09-09, against a dev server on the branch's own build (not 0.3.0 from npm), from an empty folder. 24.8 s is doctor + types + scaffold + validate + inspect + screenshot + pack. Setup once per machine is another 8.7 s.
-R2.5: TWO NUMBERS, AND THE LAST HOP IS UNTIMED. 24.8 s is the seven local verbs, a local build against a dev server on 2026-09-09. 9.3 s is save into the live library, the published 0.3.0 against noacg.studio on 2026-09-10. About thirty-five seconds of tool time from an empty folder to a graphic in your library, said as the two numbers. The hop from the library to a production's output URL has not been timed (§7 row 15). Do not round up to a minute and do not say "minutes to air".
-R2.4, THE TWO DEFECTS THE LIVE SAVE FOUND (§7 row 14). The link save prints lands on Home, not on the graphic; the graphic is in Recent graphics 5 s later, so say "it is in your library" and open it from there. And login stores the key and then hangs instead of exiting: warn the room that the terminal goes quiet after they press Allow, and that Ctrl-C is safe. The two comments in the code panel say both.
+R2.5: THREE NUMBERS, EACH FROM ITS OWN RUN. 24.8 s is the seven local verbs, a local build against a dev server on 2026-09-09. 9.3 s is save into the live library, the published 0.3.0 against noacg.studio on 2026-09-10. And the last hop, measured 2026-09-16 against noacg.studio on two runs, 7.4 s and 7.8 s: from save returning to the graphic READABLE on a production's output URL. The slide shows the slower one. Of that, the take itself is 0.7 s to a readable frame and 0.2 s to the entrance, on a warm output page. Say "about thirty-five seconds of tool time from an empty folder to a graphic in your library, and about eight more onto the output URL", and say each number as its own run. Do not round up to a minute and do not say "minutes to air".
+R2.4, THE DEFECT THE LIVE SAVE FOUND (§7 row 14). The link save prints lands on Home, not on the graphic; the graphic is in Recent graphics 5 s later, so say "it is in your library" and open it from there. The second defect of that walk, login storing the key and then hanging instead of exiting, is FIXED in @noacg/cli 0.3.3 - do not warn the room about it, unless 0.3.3 is still unpublished on the day, because the route above runs npx and takes the published version.
 ON THIS LAPTOP, BEFORE THE DAY (§7 row 16). The global @noacg/cli here is 0.2.0 and the MCP server prefers it over npx, so R2.3 would run a year of fixes behind with nothing on screen saying so. One command: npm i -g @noacg/cli@latest.
-Source: docs/DEMO_2026-09-25.md §4 R2.1 to R2.5, §7 rows 14, 15 and 16; docs/AGENT_CLI.md "Time to air, measured".</a:t>
+Source: docs/DEMO_2026-09-25.md §4 R2.1 to R2.5, §7 rows 14 and 16; docs/AGENT_CLI.md "Time to air, measured".</a:t>
             </a:r>
             <a:endParaRPr lang="en-US" dirty="0"/>
           </a:p>
@@ -5254,7 +5254,7 @@
                 <a:ea typeface="Consolas" pitchFamily="34" charset="-122"/>
                 <a:cs typeface="Consolas" pitchFamily="34" charset="-120"/>
               </a:rPr>
-              <a:t># once; quiet after Allow? Ctrl-C is safe</a:t>
+              <a:t># once; the prompt comes back after Allow</a:t>
             </a:r>
             <a:pPr indent="0" marL="0">
               <a:lnSpc>
@@ -5395,7 +5395,7 @@
                 <a:ea typeface="Arial" pitchFamily="34" charset="-122"/>
                 <a:cs typeface="Arial" pitchFamily="34" charset="-120"/>
               </a:rPr>
-              <a:t>, measured by hand on 2026-09-09. They all start a browser to reach the studio; validate is 10.7 s of it. Then save put a graphic in the live library in 9.3 s, on 2026-09-10. The hop from the library to air is still untimed.</a:t>
+              <a:t>, measured by hand on 2026-09-09. They all start a browser to reach the studio; validate is 10.7 s of it. Then save put a graphic in the live library in 9.3 s, on 2026-09-10. From there to the graphic readable on a production's output URL: 7.8 s, on 2026-09-16.</a:t>
             </a:r>
             <a:endParaRPr lang="en-US" sz="1450" dirty="0"/>
           </a:p>
